--- a/docs/migration-orders/microservice-architecture-summary.pptx
+++ b/docs/migration-orders/microservice-architecture-summary.pptx
@@ -14,6 +14,8 @@
     <p:sldId id="259" r:id="rId8"/>
     <p:sldId id="260" r:id="rId9"/>
     <p:sldId id="261" r:id="rId10"/>
+    <p:sldId id="265" r:id="rId11"/>
+    <p:sldId id="266" r:id="rId12"/>
   </p:sldIdLst>
   <p:sldSz cx="12192000" cy="6858000"/>
   <p:notesSz cx="6858000" cy="9144000"/>
@@ -269,7 +271,7 @@
           <a:p>
             <a:fld id="{6658B177-B7F3-4BBF-B431-5C6D2A4F7F63}" type="datetimeFigureOut">
               <a:rPr lang="en-TZ" smtClean="0"/>
-              <a:t>04/08/2026</a:t>
+              <a:t>27/08/2026</a:t>
             </a:fld>
             <a:endParaRPr lang="en-TZ"/>
           </a:p>
@@ -469,7 +471,7 @@
           <a:p>
             <a:fld id="{6658B177-B7F3-4BBF-B431-5C6D2A4F7F63}" type="datetimeFigureOut">
               <a:rPr lang="en-TZ" smtClean="0"/>
-              <a:t>04/08/2026</a:t>
+              <a:t>27/08/2026</a:t>
             </a:fld>
             <a:endParaRPr lang="en-TZ"/>
           </a:p>
@@ -679,7 +681,7 @@
           <a:p>
             <a:fld id="{6658B177-B7F3-4BBF-B431-5C6D2A4F7F63}" type="datetimeFigureOut">
               <a:rPr lang="en-TZ" smtClean="0"/>
-              <a:t>04/08/2026</a:t>
+              <a:t>27/08/2026</a:t>
             </a:fld>
             <a:endParaRPr lang="en-TZ"/>
           </a:p>
@@ -879,7 +881,7 @@
           <a:p>
             <a:fld id="{6658B177-B7F3-4BBF-B431-5C6D2A4F7F63}" type="datetimeFigureOut">
               <a:rPr lang="en-TZ" smtClean="0"/>
-              <a:t>04/08/2026</a:t>
+              <a:t>27/08/2026</a:t>
             </a:fld>
             <a:endParaRPr lang="en-TZ"/>
           </a:p>
@@ -1155,7 +1157,7 @@
           <a:p>
             <a:fld id="{6658B177-B7F3-4BBF-B431-5C6D2A4F7F63}" type="datetimeFigureOut">
               <a:rPr lang="en-TZ" smtClean="0"/>
-              <a:t>04/08/2026</a:t>
+              <a:t>27/08/2026</a:t>
             </a:fld>
             <a:endParaRPr lang="en-TZ"/>
           </a:p>
@@ -1423,7 +1425,7 @@
           <a:p>
             <a:fld id="{6658B177-B7F3-4BBF-B431-5C6D2A4F7F63}" type="datetimeFigureOut">
               <a:rPr lang="en-TZ" smtClean="0"/>
-              <a:t>04/08/2026</a:t>
+              <a:t>27/08/2026</a:t>
             </a:fld>
             <a:endParaRPr lang="en-TZ"/>
           </a:p>
@@ -1838,7 +1840,7 @@
           <a:p>
             <a:fld id="{6658B177-B7F3-4BBF-B431-5C6D2A4F7F63}" type="datetimeFigureOut">
               <a:rPr lang="en-TZ" smtClean="0"/>
-              <a:t>04/08/2026</a:t>
+              <a:t>27/08/2026</a:t>
             </a:fld>
             <a:endParaRPr lang="en-TZ"/>
           </a:p>
@@ -1980,7 +1982,7 @@
           <a:p>
             <a:fld id="{6658B177-B7F3-4BBF-B431-5C6D2A4F7F63}" type="datetimeFigureOut">
               <a:rPr lang="en-TZ" smtClean="0"/>
-              <a:t>04/08/2026</a:t>
+              <a:t>27/08/2026</a:t>
             </a:fld>
             <a:endParaRPr lang="en-TZ"/>
           </a:p>
@@ -2093,7 +2095,7 @@
           <a:p>
             <a:fld id="{6658B177-B7F3-4BBF-B431-5C6D2A4F7F63}" type="datetimeFigureOut">
               <a:rPr lang="en-TZ" smtClean="0"/>
-              <a:t>04/08/2026</a:t>
+              <a:t>27/08/2026</a:t>
             </a:fld>
             <a:endParaRPr lang="en-TZ"/>
           </a:p>
@@ -2406,7 +2408,7 @@
           <a:p>
             <a:fld id="{6658B177-B7F3-4BBF-B431-5C6D2A4F7F63}" type="datetimeFigureOut">
               <a:rPr lang="en-TZ" smtClean="0"/>
-              <a:t>04/08/2026</a:t>
+              <a:t>27/08/2026</a:t>
             </a:fld>
             <a:endParaRPr lang="en-TZ"/>
           </a:p>
@@ -2695,7 +2697,7 @@
           <a:p>
             <a:fld id="{6658B177-B7F3-4BBF-B431-5C6D2A4F7F63}" type="datetimeFigureOut">
               <a:rPr lang="en-TZ" smtClean="0"/>
-              <a:t>04/08/2026</a:t>
+              <a:t>27/08/2026</a:t>
             </a:fld>
             <a:endParaRPr lang="en-TZ"/>
           </a:p>
@@ -2938,7 +2940,7 @@
           <a:p>
             <a:fld id="{6658B177-B7F3-4BBF-B431-5C6D2A4F7F63}" type="datetimeFigureOut">
               <a:rPr lang="en-TZ" smtClean="0"/>
-              <a:t>04/08/2026</a:t>
+              <a:t>27/08/2026</a:t>
             </a:fld>
             <a:endParaRPr lang="en-TZ"/>
           </a:p>
@@ -6657,6 +6659,210 @@
 </p:sld>
 </file>
 
+<file path=ppt/slides/slide10.xml><?xml version="1.0" encoding="utf-8"?>
+<p:sld xmlns:a="http://schemas.openxmlformats.org/drawingml/2006/main" xmlns:r="http://schemas.openxmlformats.org/officeDocument/2006/relationships" xmlns:p="http://schemas.openxmlformats.org/presentationml/2006/main">
+  <p:cSld>
+    <p:spTree>
+      <p:nvGrpSpPr>
+        <p:cNvPr id="1" name=""/>
+        <p:cNvGrpSpPr/>
+        <p:nvPr/>
+      </p:nvGrpSpPr>
+      <p:grpSpPr>
+        <a:xfrm>
+          <a:off x="0" y="0"/>
+          <a:ext cx="0" cy="0"/>
+          <a:chOff x="0" y="0"/>
+          <a:chExt cx="0" cy="0"/>
+        </a:xfrm>
+      </p:grpSpPr>
+      <p:pic>
+        <p:nvPicPr>
+          <p:cNvPr id="5" name="Picture 4">
+            <a:extLst>
+              <a:ext uri="{FF2B5EF4-FFF2-40B4-BE49-F238E27FC236}">
+                <a16:creationId xmlns:a16="http://schemas.microsoft.com/office/drawing/2014/main" id="{7098C859-9B8F-48BF-BD65-385535BCF916}"/>
+              </a:ext>
+            </a:extLst>
+          </p:cNvPr>
+          <p:cNvPicPr>
+            <a:picLocks noChangeAspect="1"/>
+          </p:cNvPicPr>
+          <p:nvPr/>
+        </p:nvPicPr>
+        <p:blipFill>
+          <a:blip r:embed="rId2"/>
+          <a:stretch>
+            <a:fillRect/>
+          </a:stretch>
+        </p:blipFill>
+        <p:spPr>
+          <a:xfrm>
+            <a:off x="1851160" y="724838"/>
+            <a:ext cx="9052387" cy="6050164"/>
+          </a:xfrm>
+          <a:prstGeom prst="rect">
+            <a:avLst/>
+          </a:prstGeom>
+        </p:spPr>
+      </p:pic>
+      <p:sp>
+        <p:nvSpPr>
+          <p:cNvPr id="6" name="TextBox 5">
+            <a:extLst>
+              <a:ext uri="{FF2B5EF4-FFF2-40B4-BE49-F238E27FC236}">
+                <a16:creationId xmlns:a16="http://schemas.microsoft.com/office/drawing/2014/main" id="{F69767BB-E6AB-4B9A-BE4E-FA12FB9C9256}"/>
+              </a:ext>
+            </a:extLst>
+          </p:cNvPr>
+          <p:cNvSpPr txBox="1"/>
+          <p:nvPr/>
+        </p:nvSpPr>
+        <p:spPr>
+          <a:xfrm>
+            <a:off x="334107" y="189034"/>
+            <a:ext cx="4914900" cy="461665"/>
+          </a:xfrm>
+          <a:prstGeom prst="rect">
+            <a:avLst/>
+          </a:prstGeom>
+          <a:noFill/>
+        </p:spPr>
+        <p:txBody>
+          <a:bodyPr wrap="square" rtlCol="0">
+            <a:spAutoFit/>
+          </a:bodyPr>
+          <a:lstStyle/>
+          <a:p>
+            <a:r>
+              <a:rPr lang="en-US" sz="2400" b="1" dirty="0"/>
+              <a:t>V2.29 Data Pipeline Architecture</a:t>
+            </a:r>
+            <a:endParaRPr lang="en-TZ" sz="2400" b="1" dirty="0"/>
+          </a:p>
+        </p:txBody>
+      </p:sp>
+    </p:spTree>
+    <p:extLst>
+      <p:ext uri="{BB962C8B-B14F-4D97-AF65-F5344CB8AC3E}">
+        <p14:creationId xmlns:p14="http://schemas.microsoft.com/office/powerpoint/2010/main" val="21351990"/>
+      </p:ext>
+    </p:extLst>
+  </p:cSld>
+  <p:clrMapOvr>
+    <a:masterClrMapping/>
+  </p:clrMapOvr>
+</p:sld>
+</file>
+
+<file path=ppt/slides/slide11.xml><?xml version="1.0" encoding="utf-8"?>
+<p:sld xmlns:a="http://schemas.openxmlformats.org/drawingml/2006/main" xmlns:r="http://schemas.openxmlformats.org/officeDocument/2006/relationships" xmlns:p="http://schemas.openxmlformats.org/presentationml/2006/main">
+  <p:cSld>
+    <p:spTree>
+      <p:nvGrpSpPr>
+        <p:cNvPr id="1" name=""/>
+        <p:cNvGrpSpPr/>
+        <p:nvPr/>
+      </p:nvGrpSpPr>
+      <p:grpSpPr>
+        <a:xfrm>
+          <a:off x="0" y="0"/>
+          <a:ext cx="0" cy="0"/>
+          <a:chOff x="0" y="0"/>
+          <a:chExt cx="0" cy="0"/>
+        </a:xfrm>
+      </p:grpSpPr>
+      <p:pic>
+        <p:nvPicPr>
+          <p:cNvPr id="5" name="Picture 4">
+            <a:extLst>
+              <a:ext uri="{FF2B5EF4-FFF2-40B4-BE49-F238E27FC236}">
+                <a16:creationId xmlns:a16="http://schemas.microsoft.com/office/drawing/2014/main" id="{5C151896-75D5-4374-A996-1FD9C9244B85}"/>
+              </a:ext>
+            </a:extLst>
+          </p:cNvPr>
+          <p:cNvPicPr>
+            <a:picLocks noChangeAspect="1"/>
+          </p:cNvPicPr>
+          <p:nvPr/>
+        </p:nvPicPr>
+        <p:blipFill>
+          <a:blip r:embed="rId2"/>
+          <a:stretch>
+            <a:fillRect/>
+          </a:stretch>
+        </p:blipFill>
+        <p:spPr>
+          <a:xfrm>
+            <a:off x="1966039" y="1528442"/>
+            <a:ext cx="8259922" cy="4838607"/>
+          </a:xfrm>
+          <a:prstGeom prst="rect">
+            <a:avLst/>
+          </a:prstGeom>
+        </p:spPr>
+      </p:pic>
+      <p:sp>
+        <p:nvSpPr>
+          <p:cNvPr id="6" name="TextBox 5">
+            <a:extLst>
+              <a:ext uri="{FF2B5EF4-FFF2-40B4-BE49-F238E27FC236}">
+                <a16:creationId xmlns:a16="http://schemas.microsoft.com/office/drawing/2014/main" id="{D92E674D-7A4E-4708-A9DD-FCE1153E12FB}"/>
+              </a:ext>
+            </a:extLst>
+          </p:cNvPr>
+          <p:cNvSpPr txBox="1"/>
+          <p:nvPr/>
+        </p:nvSpPr>
+        <p:spPr>
+          <a:xfrm>
+            <a:off x="369276" y="490951"/>
+            <a:ext cx="10928839" cy="461665"/>
+          </a:xfrm>
+          <a:prstGeom prst="rect">
+            <a:avLst/>
+          </a:prstGeom>
+          <a:noFill/>
+        </p:spPr>
+        <p:txBody>
+          <a:bodyPr wrap="square" rtlCol="0">
+            <a:spAutoFit/>
+          </a:bodyPr>
+          <a:lstStyle/>
+          <a:p>
+            <a:r>
+              <a:rPr lang="en-US" sz="2400" dirty="0"/>
+              <a:t>Contabo VPS </a:t>
+            </a:r>
+            <a:r>
+              <a:rPr lang="en-US" sz="2400" dirty="0">
+                <a:sym typeface="Wingdings" panose="05000000000000000000" pitchFamily="2" charset="2"/>
+              </a:rPr>
+              <a:t> Railway Gateway  PostgreSQL  Prisma ORM  Nest.JS  </a:t>
+            </a:r>
+            <a:r>
+              <a:rPr lang="en-US" sz="2400" dirty="0" err="1">
+                <a:sym typeface="Wingdings" panose="05000000000000000000" pitchFamily="2" charset="2"/>
+              </a:rPr>
+              <a:t>Textai</a:t>
+            </a:r>
+            <a:endParaRPr lang="en-TZ" sz="2400" dirty="0"/>
+          </a:p>
+        </p:txBody>
+      </p:sp>
+    </p:spTree>
+    <p:extLst>
+      <p:ext uri="{BB962C8B-B14F-4D97-AF65-F5344CB8AC3E}">
+        <p14:creationId xmlns:p14="http://schemas.microsoft.com/office/powerpoint/2010/main" val="2587939300"/>
+      </p:ext>
+    </p:extLst>
+  </p:cSld>
+  <p:clrMapOvr>
+    <a:masterClrMapping/>
+  </p:clrMapOvr>
+</p:sld>
+</file>
+
 <file path=ppt/slides/slide2.xml><?xml version="1.0" encoding="utf-8"?>
 <p:sld xmlns:a="http://schemas.openxmlformats.org/drawingml/2006/main" xmlns:r="http://schemas.openxmlformats.org/officeDocument/2006/relationships" xmlns:p="http://schemas.openxmlformats.org/presentationml/2006/main">
   <p:cSld>
